--- a/ppt/Software-Project-Lab-1-ImCloneDetect-Final.pptx
+++ b/ppt/Software-Project-Lab-1-ImCloneDetect-Final.pptx
@@ -5,10 +5,10 @@
     <p:sldMasterId id="2147483655" r:id="rId1"/>
   </p:sldMasterIdLst>
   <p:notesMasterIdLst>
-    <p:notesMasterId r:id="rId23"/>
+    <p:notesMasterId r:id="rId24"/>
   </p:notesMasterIdLst>
   <p:handoutMasterIdLst>
-    <p:handoutMasterId r:id="rId24"/>
+    <p:handoutMasterId r:id="rId25"/>
   </p:handoutMasterIdLst>
   <p:sldIdLst>
     <p:sldId id="273" r:id="rId2"/>
@@ -21,28 +21,29 @@
     <p:sldId id="271" r:id="rId9"/>
     <p:sldId id="272" r:id="rId10"/>
     <p:sldId id="284" r:id="rId11"/>
-    <p:sldId id="276" r:id="rId12"/>
-    <p:sldId id="264" r:id="rId13"/>
-    <p:sldId id="277" r:id="rId14"/>
-    <p:sldId id="278" r:id="rId15"/>
-    <p:sldId id="282" r:id="rId16"/>
-    <p:sldId id="283" r:id="rId17"/>
-    <p:sldId id="285" r:id="rId18"/>
-    <p:sldId id="280" r:id="rId19"/>
-    <p:sldId id="286" r:id="rId20"/>
-    <p:sldId id="279" r:id="rId21"/>
-    <p:sldId id="281" r:id="rId22"/>
+    <p:sldId id="288" r:id="rId12"/>
+    <p:sldId id="276" r:id="rId13"/>
+    <p:sldId id="264" r:id="rId14"/>
+    <p:sldId id="277" r:id="rId15"/>
+    <p:sldId id="278" r:id="rId16"/>
+    <p:sldId id="282" r:id="rId17"/>
+    <p:sldId id="283" r:id="rId18"/>
+    <p:sldId id="285" r:id="rId19"/>
+    <p:sldId id="280" r:id="rId20"/>
+    <p:sldId id="286" r:id="rId21"/>
+    <p:sldId id="279" r:id="rId22"/>
+    <p:sldId id="281" r:id="rId23"/>
   </p:sldIdLst>
   <p:sldSz cx="14630400" cy="8229600"/>
   <p:notesSz cx="8229600" cy="14630400"/>
   <p:embeddedFontLst>
     <p:embeddedFont>
       <p:font typeface="Cambria Math" panose="02040503050406030204" pitchFamily="18" charset="0"/>
-      <p:regular r:id="rId25"/>
+      <p:regular r:id="rId26"/>
     </p:embeddedFont>
     <p:embeddedFont>
       <p:font typeface="Inter" panose="020B0604020202020204" charset="0"/>
-      <p:regular r:id="rId26"/>
+      <p:regular r:id="rId27"/>
     </p:embeddedFont>
   </p:embeddedFontLst>
   <p:defaultTextStyle>
@@ -686,6 +687,114 @@
         <p:cNvPr id="1" name="">
           <a:extLst>
             <a:ext uri="{FF2B5EF4-FFF2-40B4-BE49-F238E27FC236}">
+              <a16:creationId xmlns:a16="http://schemas.microsoft.com/office/drawing/2014/main" id="{6AE41EE6-7AB8-6BC7-E0EF-C3C54F2A20D8}"/>
+            </a:ext>
+          </a:extLst>
+        </p:cNvPr>
+        <p:cNvGrpSpPr/>
+        <p:nvPr/>
+      </p:nvGrpSpPr>
+      <p:grpSpPr>
+        <a:xfrm>
+          <a:off x="0" y="0"/>
+          <a:ext cx="0" cy="0"/>
+          <a:chOff x="0" y="0"/>
+          <a:chExt cx="0" cy="0"/>
+        </a:xfrm>
+      </p:grpSpPr>
+      <p:sp>
+        <p:nvSpPr>
+          <p:cNvPr id="2" name="Slide Image Placeholder 1">
+            <a:extLst>
+              <a:ext uri="{FF2B5EF4-FFF2-40B4-BE49-F238E27FC236}">
+                <a16:creationId xmlns:a16="http://schemas.microsoft.com/office/drawing/2014/main" id="{3B1174B9-E3B7-379D-B09F-6565B535D323}"/>
+              </a:ext>
+            </a:extLst>
+          </p:cNvPr>
+          <p:cNvSpPr>
+            <a:spLocks noGrp="1" noRot="1" noChangeAspect="1"/>
+          </p:cNvSpPr>
+          <p:nvPr>
+            <p:ph type="sldImg"/>
+          </p:nvPr>
+        </p:nvSpPr>
+        <p:spPr/>
+      </p:sp>
+      <p:sp>
+        <p:nvSpPr>
+          <p:cNvPr id="3" name="Notes Placeholder 2">
+            <a:extLst>
+              <a:ext uri="{FF2B5EF4-FFF2-40B4-BE49-F238E27FC236}">
+                <a16:creationId xmlns:a16="http://schemas.microsoft.com/office/drawing/2014/main" id="{EA9B9AB1-DB63-0BD7-B8B3-0B4C72E54338}"/>
+              </a:ext>
+            </a:extLst>
+          </p:cNvPr>
+          <p:cNvSpPr>
+            <a:spLocks noGrp="1"/>
+          </p:cNvSpPr>
+          <p:nvPr>
+            <p:ph type="body" idx="1"/>
+          </p:nvPr>
+        </p:nvSpPr>
+        <p:spPr/>
+        <p:txBody>
+          <a:bodyPr/>
+          <a:lstStyle/>
+          <a:p>
+            <a:endParaRPr lang="en-US" dirty="0"/>
+          </a:p>
+        </p:txBody>
+      </p:sp>
+      <p:sp>
+        <p:nvSpPr>
+          <p:cNvPr id="4" name="Slide Number Placeholder 3">
+            <a:extLst>
+              <a:ext uri="{FF2B5EF4-FFF2-40B4-BE49-F238E27FC236}">
+                <a16:creationId xmlns:a16="http://schemas.microsoft.com/office/drawing/2014/main" id="{291BA178-9E96-6EFC-4161-66A3E54616D0}"/>
+              </a:ext>
+            </a:extLst>
+          </p:cNvPr>
+          <p:cNvSpPr>
+            <a:spLocks noGrp="1"/>
+          </p:cNvSpPr>
+          <p:nvPr>
+            <p:ph type="sldNum" sz="quarter" idx="10"/>
+          </p:nvPr>
+        </p:nvSpPr>
+        <p:spPr/>
+        <p:txBody>
+          <a:bodyPr/>
+          <a:lstStyle/>
+          <a:p>
+            <a:fld id="{F7021451-1387-4CA6-816F-3879F97B5CBC}" type="slidenum">
+              <a:rPr lang="en-US"/>
+              <a:t>11</a:t>
+            </a:fld>
+            <a:endParaRPr lang="en-US"/>
+          </a:p>
+        </p:txBody>
+      </p:sp>
+    </p:spTree>
+    <p:extLst>
+      <p:ext uri="{BB962C8B-B14F-4D97-AF65-F5344CB8AC3E}">
+        <p14:creationId xmlns:p14="http://schemas.microsoft.com/office/powerpoint/2010/main" val="2317486735"/>
+      </p:ext>
+    </p:extLst>
+  </p:cSld>
+  <p:clrMapOvr>
+    <a:masterClrMapping/>
+  </p:clrMapOvr>
+</p:notes>
+</file>
+
+<file path=ppt/notesSlides/notesSlide12.xml><?xml version="1.0" encoding="utf-8"?>
+<p:notes xmlns:a="http://schemas.openxmlformats.org/drawingml/2006/main" xmlns:r="http://schemas.openxmlformats.org/officeDocument/2006/relationships" xmlns:p="http://schemas.openxmlformats.org/presentationml/2006/main">
+  <p:cSld>
+    <p:spTree>
+      <p:nvGrpSpPr>
+        <p:cNvPr id="1" name="">
+          <a:extLst>
+            <a:ext uri="{FF2B5EF4-FFF2-40B4-BE49-F238E27FC236}">
               <a16:creationId xmlns:a16="http://schemas.microsoft.com/office/drawing/2014/main" id="{9FFC7731-6712-FD85-C282-900CD7AE3C42}"/>
             </a:ext>
           </a:extLst>
@@ -767,7 +876,7 @@
           <a:p>
             <a:fld id="{F7021451-1387-4CA6-816F-3879F97B5CBC}" type="slidenum">
               <a:rPr lang="en-US"/>
-              <a:t>11</a:t>
+              <a:t>12</a:t>
             </a:fld>
             <a:endParaRPr lang="en-US"/>
           </a:p>
@@ -786,7 +895,7 @@
 </p:notes>
 </file>
 
-<file path=ppt/notesSlides/notesSlide12.xml><?xml version="1.0" encoding="utf-8"?>
+<file path=ppt/notesSlides/notesSlide13.xml><?xml version="1.0" encoding="utf-8"?>
 <p:notes xmlns:a="http://schemas.openxmlformats.org/drawingml/2006/main" xmlns:r="http://schemas.openxmlformats.org/officeDocument/2006/relationships" xmlns:p="http://schemas.openxmlformats.org/presentationml/2006/main">
   <p:cSld>
     <p:spTree>
@@ -875,7 +984,7 @@
           <a:p>
             <a:fld id="{F7021451-1387-4CA6-816F-3879F97B5CBC}" type="slidenum">
               <a:rPr lang="en-US"/>
-              <a:t>12</a:t>
+              <a:t>13</a:t>
             </a:fld>
             <a:endParaRPr lang="en-US"/>
           </a:p>
@@ -894,7 +1003,7 @@
 </p:notes>
 </file>
 
-<file path=ppt/notesSlides/notesSlide13.xml><?xml version="1.0" encoding="utf-8"?>
+<file path=ppt/notesSlides/notesSlide14.xml><?xml version="1.0" encoding="utf-8"?>
 <p:notes xmlns:a="http://schemas.openxmlformats.org/drawingml/2006/main" xmlns:r="http://schemas.openxmlformats.org/officeDocument/2006/relationships" xmlns:p="http://schemas.openxmlformats.org/presentationml/2006/main">
   <p:cSld>
     <p:spTree>
@@ -983,7 +1092,7 @@
           <a:p>
             <a:fld id="{F7021451-1387-4CA6-816F-3879F97B5CBC}" type="slidenum">
               <a:rPr lang="en-US"/>
-              <a:t>13</a:t>
+              <a:t>14</a:t>
             </a:fld>
             <a:endParaRPr lang="en-US"/>
           </a:p>
@@ -1002,7 +1111,7 @@
 </p:notes>
 </file>
 
-<file path=ppt/notesSlides/notesSlide14.xml><?xml version="1.0" encoding="utf-8"?>
+<file path=ppt/notesSlides/notesSlide15.xml><?xml version="1.0" encoding="utf-8"?>
 <p:notes xmlns:a="http://schemas.openxmlformats.org/drawingml/2006/main" xmlns:r="http://schemas.openxmlformats.org/officeDocument/2006/relationships" xmlns:p="http://schemas.openxmlformats.org/presentationml/2006/main">
   <p:cSld>
     <p:spTree>
@@ -1091,7 +1200,7 @@
           <a:p>
             <a:fld id="{F7021451-1387-4CA6-816F-3879F97B5CBC}" type="slidenum">
               <a:rPr lang="en-US"/>
-              <a:t>14</a:t>
+              <a:t>15</a:t>
             </a:fld>
             <a:endParaRPr lang="en-US"/>
           </a:p>
@@ -1110,7 +1219,7 @@
 </p:notes>
 </file>
 
-<file path=ppt/notesSlides/notesSlide15.xml><?xml version="1.0" encoding="utf-8"?>
+<file path=ppt/notesSlides/notesSlide16.xml><?xml version="1.0" encoding="utf-8"?>
 <p:notes xmlns:a="http://schemas.openxmlformats.org/drawingml/2006/main" xmlns:r="http://schemas.openxmlformats.org/officeDocument/2006/relationships" xmlns:p="http://schemas.openxmlformats.org/presentationml/2006/main">
   <p:cSld>
     <p:spTree>
@@ -1199,7 +1308,7 @@
           <a:p>
             <a:fld id="{F7021451-1387-4CA6-816F-3879F97B5CBC}" type="slidenum">
               <a:rPr lang="en-US"/>
-              <a:t>15</a:t>
+              <a:t>16</a:t>
             </a:fld>
             <a:endParaRPr lang="en-US"/>
           </a:p>
@@ -1218,7 +1327,7 @@
 </p:notes>
 </file>
 
-<file path=ppt/notesSlides/notesSlide16.xml><?xml version="1.0" encoding="utf-8"?>
+<file path=ppt/notesSlides/notesSlide17.xml><?xml version="1.0" encoding="utf-8"?>
 <p:notes xmlns:a="http://schemas.openxmlformats.org/drawingml/2006/main" xmlns:r="http://schemas.openxmlformats.org/officeDocument/2006/relationships" xmlns:p="http://schemas.openxmlformats.org/presentationml/2006/main">
   <p:cSld>
     <p:spTree>
@@ -1307,7 +1416,7 @@
           <a:p>
             <a:fld id="{F7021451-1387-4CA6-816F-3879F97B5CBC}" type="slidenum">
               <a:rPr lang="en-US"/>
-              <a:t>16</a:t>
+              <a:t>17</a:t>
             </a:fld>
             <a:endParaRPr lang="en-US"/>
           </a:p>
@@ -1326,7 +1435,7 @@
 </p:notes>
 </file>
 
-<file path=ppt/notesSlides/notesSlide17.xml><?xml version="1.0" encoding="utf-8"?>
+<file path=ppt/notesSlides/notesSlide18.xml><?xml version="1.0" encoding="utf-8"?>
 <p:notes xmlns:a="http://schemas.openxmlformats.org/drawingml/2006/main" xmlns:r="http://schemas.openxmlformats.org/officeDocument/2006/relationships" xmlns:p="http://schemas.openxmlformats.org/presentationml/2006/main">
   <p:cSld>
     <p:spTree>
@@ -1415,7 +1524,7 @@
           <a:p>
             <a:fld id="{F7021451-1387-4CA6-816F-3879F97B5CBC}" type="slidenum">
               <a:rPr lang="en-US"/>
-              <a:t>17</a:t>
+              <a:t>18</a:t>
             </a:fld>
             <a:endParaRPr lang="en-US"/>
           </a:p>
@@ -1434,7 +1543,7 @@
 </p:notes>
 </file>
 
-<file path=ppt/notesSlides/notesSlide18.xml><?xml version="1.0" encoding="utf-8"?>
+<file path=ppt/notesSlides/notesSlide19.xml><?xml version="1.0" encoding="utf-8"?>
 <p:notes xmlns:a="http://schemas.openxmlformats.org/drawingml/2006/main" xmlns:r="http://schemas.openxmlformats.org/officeDocument/2006/relationships" xmlns:p="http://schemas.openxmlformats.org/presentationml/2006/main">
   <p:cSld>
     <p:spTree>
@@ -1523,7 +1632,7 @@
           <a:p>
             <a:fld id="{F7021451-1387-4CA6-816F-3879F97B5CBC}" type="slidenum">
               <a:rPr lang="en-US"/>
-              <a:t>18</a:t>
+              <a:t>19</a:t>
             </a:fld>
             <a:endParaRPr lang="en-US"/>
           </a:p>
@@ -1533,114 +1642,6 @@
     <p:extLst>
       <p:ext uri="{BB962C8B-B14F-4D97-AF65-F5344CB8AC3E}">
         <p14:creationId xmlns:p14="http://schemas.microsoft.com/office/powerpoint/2010/main" val="3873115408"/>
-      </p:ext>
-    </p:extLst>
-  </p:cSld>
-  <p:clrMapOvr>
-    <a:masterClrMapping/>
-  </p:clrMapOvr>
-</p:notes>
-</file>
-
-<file path=ppt/notesSlides/notesSlide19.xml><?xml version="1.0" encoding="utf-8"?>
-<p:notes xmlns:a="http://schemas.openxmlformats.org/drawingml/2006/main" xmlns:r="http://schemas.openxmlformats.org/officeDocument/2006/relationships" xmlns:p="http://schemas.openxmlformats.org/presentationml/2006/main">
-  <p:cSld>
-    <p:spTree>
-      <p:nvGrpSpPr>
-        <p:cNvPr id="1" name="">
-          <a:extLst>
-            <a:ext uri="{FF2B5EF4-FFF2-40B4-BE49-F238E27FC236}">
-              <a16:creationId xmlns:a16="http://schemas.microsoft.com/office/drawing/2014/main" id="{C73F37B4-273C-2672-1ACB-973793E1E587}"/>
-            </a:ext>
-          </a:extLst>
-        </p:cNvPr>
-        <p:cNvGrpSpPr/>
-        <p:nvPr/>
-      </p:nvGrpSpPr>
-      <p:grpSpPr>
-        <a:xfrm>
-          <a:off x="0" y="0"/>
-          <a:ext cx="0" cy="0"/>
-          <a:chOff x="0" y="0"/>
-          <a:chExt cx="0" cy="0"/>
-        </a:xfrm>
-      </p:grpSpPr>
-      <p:sp>
-        <p:nvSpPr>
-          <p:cNvPr id="2" name="Slide Image Placeholder 1">
-            <a:extLst>
-              <a:ext uri="{FF2B5EF4-FFF2-40B4-BE49-F238E27FC236}">
-                <a16:creationId xmlns:a16="http://schemas.microsoft.com/office/drawing/2014/main" id="{35591657-C5CA-1F65-7B59-FB45C721C333}"/>
-              </a:ext>
-            </a:extLst>
-          </p:cNvPr>
-          <p:cNvSpPr>
-            <a:spLocks noGrp="1" noRot="1" noChangeAspect="1"/>
-          </p:cNvSpPr>
-          <p:nvPr>
-            <p:ph type="sldImg"/>
-          </p:nvPr>
-        </p:nvSpPr>
-        <p:spPr/>
-      </p:sp>
-      <p:sp>
-        <p:nvSpPr>
-          <p:cNvPr id="3" name="Notes Placeholder 2">
-            <a:extLst>
-              <a:ext uri="{FF2B5EF4-FFF2-40B4-BE49-F238E27FC236}">
-                <a16:creationId xmlns:a16="http://schemas.microsoft.com/office/drawing/2014/main" id="{9EF1BA8D-5FD8-87AF-8D16-027D946D222D}"/>
-              </a:ext>
-            </a:extLst>
-          </p:cNvPr>
-          <p:cNvSpPr>
-            <a:spLocks noGrp="1"/>
-          </p:cNvSpPr>
-          <p:nvPr>
-            <p:ph type="body" idx="1"/>
-          </p:nvPr>
-        </p:nvSpPr>
-        <p:spPr/>
-        <p:txBody>
-          <a:bodyPr/>
-          <a:lstStyle/>
-          <a:p>
-            <a:endParaRPr lang="en-US" dirty="0"/>
-          </a:p>
-        </p:txBody>
-      </p:sp>
-      <p:sp>
-        <p:nvSpPr>
-          <p:cNvPr id="4" name="Slide Number Placeholder 3">
-            <a:extLst>
-              <a:ext uri="{FF2B5EF4-FFF2-40B4-BE49-F238E27FC236}">
-                <a16:creationId xmlns:a16="http://schemas.microsoft.com/office/drawing/2014/main" id="{ABCA7733-C0BD-82E9-D166-4018198387E7}"/>
-              </a:ext>
-            </a:extLst>
-          </p:cNvPr>
-          <p:cNvSpPr>
-            <a:spLocks noGrp="1"/>
-          </p:cNvSpPr>
-          <p:nvPr>
-            <p:ph type="sldNum" sz="quarter" idx="10"/>
-          </p:nvPr>
-        </p:nvSpPr>
-        <p:spPr/>
-        <p:txBody>
-          <a:bodyPr/>
-          <a:lstStyle/>
-          <a:p>
-            <a:fld id="{F7021451-1387-4CA6-816F-3879F97B5CBC}" type="slidenum">
-              <a:rPr lang="en-US"/>
-              <a:t>19</a:t>
-            </a:fld>
-            <a:endParaRPr lang="en-US"/>
-          </a:p>
-        </p:txBody>
-      </p:sp>
-    </p:spTree>
-    <p:extLst>
-      <p:ext uri="{BB962C8B-B14F-4D97-AF65-F5344CB8AC3E}">
-        <p14:creationId xmlns:p14="http://schemas.microsoft.com/office/powerpoint/2010/main" val="2427415886"/>
       </p:ext>
     </p:extLst>
   </p:cSld>
@@ -1766,6 +1767,114 @@
         <p:cNvPr id="1" name="">
           <a:extLst>
             <a:ext uri="{FF2B5EF4-FFF2-40B4-BE49-F238E27FC236}">
+              <a16:creationId xmlns:a16="http://schemas.microsoft.com/office/drawing/2014/main" id="{C73F37B4-273C-2672-1ACB-973793E1E587}"/>
+            </a:ext>
+          </a:extLst>
+        </p:cNvPr>
+        <p:cNvGrpSpPr/>
+        <p:nvPr/>
+      </p:nvGrpSpPr>
+      <p:grpSpPr>
+        <a:xfrm>
+          <a:off x="0" y="0"/>
+          <a:ext cx="0" cy="0"/>
+          <a:chOff x="0" y="0"/>
+          <a:chExt cx="0" cy="0"/>
+        </a:xfrm>
+      </p:grpSpPr>
+      <p:sp>
+        <p:nvSpPr>
+          <p:cNvPr id="2" name="Slide Image Placeholder 1">
+            <a:extLst>
+              <a:ext uri="{FF2B5EF4-FFF2-40B4-BE49-F238E27FC236}">
+                <a16:creationId xmlns:a16="http://schemas.microsoft.com/office/drawing/2014/main" id="{35591657-C5CA-1F65-7B59-FB45C721C333}"/>
+              </a:ext>
+            </a:extLst>
+          </p:cNvPr>
+          <p:cNvSpPr>
+            <a:spLocks noGrp="1" noRot="1" noChangeAspect="1"/>
+          </p:cNvSpPr>
+          <p:nvPr>
+            <p:ph type="sldImg"/>
+          </p:nvPr>
+        </p:nvSpPr>
+        <p:spPr/>
+      </p:sp>
+      <p:sp>
+        <p:nvSpPr>
+          <p:cNvPr id="3" name="Notes Placeholder 2">
+            <a:extLst>
+              <a:ext uri="{FF2B5EF4-FFF2-40B4-BE49-F238E27FC236}">
+                <a16:creationId xmlns:a16="http://schemas.microsoft.com/office/drawing/2014/main" id="{9EF1BA8D-5FD8-87AF-8D16-027D946D222D}"/>
+              </a:ext>
+            </a:extLst>
+          </p:cNvPr>
+          <p:cNvSpPr>
+            <a:spLocks noGrp="1"/>
+          </p:cNvSpPr>
+          <p:nvPr>
+            <p:ph type="body" idx="1"/>
+          </p:nvPr>
+        </p:nvSpPr>
+        <p:spPr/>
+        <p:txBody>
+          <a:bodyPr/>
+          <a:lstStyle/>
+          <a:p>
+            <a:endParaRPr lang="en-US" dirty="0"/>
+          </a:p>
+        </p:txBody>
+      </p:sp>
+      <p:sp>
+        <p:nvSpPr>
+          <p:cNvPr id="4" name="Slide Number Placeholder 3">
+            <a:extLst>
+              <a:ext uri="{FF2B5EF4-FFF2-40B4-BE49-F238E27FC236}">
+                <a16:creationId xmlns:a16="http://schemas.microsoft.com/office/drawing/2014/main" id="{ABCA7733-C0BD-82E9-D166-4018198387E7}"/>
+              </a:ext>
+            </a:extLst>
+          </p:cNvPr>
+          <p:cNvSpPr>
+            <a:spLocks noGrp="1"/>
+          </p:cNvSpPr>
+          <p:nvPr>
+            <p:ph type="sldNum" sz="quarter" idx="10"/>
+          </p:nvPr>
+        </p:nvSpPr>
+        <p:spPr/>
+        <p:txBody>
+          <a:bodyPr/>
+          <a:lstStyle/>
+          <a:p>
+            <a:fld id="{F7021451-1387-4CA6-816F-3879F97B5CBC}" type="slidenum">
+              <a:rPr lang="en-US"/>
+              <a:t>20</a:t>
+            </a:fld>
+            <a:endParaRPr lang="en-US"/>
+          </a:p>
+        </p:txBody>
+      </p:sp>
+    </p:spTree>
+    <p:extLst>
+      <p:ext uri="{BB962C8B-B14F-4D97-AF65-F5344CB8AC3E}">
+        <p14:creationId xmlns:p14="http://schemas.microsoft.com/office/powerpoint/2010/main" val="2427415886"/>
+      </p:ext>
+    </p:extLst>
+  </p:cSld>
+  <p:clrMapOvr>
+    <a:masterClrMapping/>
+  </p:clrMapOvr>
+</p:notes>
+</file>
+
+<file path=ppt/notesSlides/notesSlide21.xml><?xml version="1.0" encoding="utf-8"?>
+<p:notes xmlns:a="http://schemas.openxmlformats.org/drawingml/2006/main" xmlns:r="http://schemas.openxmlformats.org/officeDocument/2006/relationships" xmlns:p="http://schemas.openxmlformats.org/presentationml/2006/main">
+  <p:cSld>
+    <p:spTree>
+      <p:nvGrpSpPr>
+        <p:cNvPr id="1" name="">
+          <a:extLst>
+            <a:ext uri="{FF2B5EF4-FFF2-40B4-BE49-F238E27FC236}">
               <a16:creationId xmlns:a16="http://schemas.microsoft.com/office/drawing/2014/main" id="{2D5BB2A6-203B-97A2-EA90-FCC9D96494F8}"/>
             </a:ext>
           </a:extLst>
@@ -1847,7 +1956,7 @@
           <a:p>
             <a:fld id="{F7021451-1387-4CA6-816F-3879F97B5CBC}" type="slidenum">
               <a:rPr lang="en-US"/>
-              <a:t>20</a:t>
+              <a:t>21</a:t>
             </a:fld>
             <a:endParaRPr lang="en-US"/>
           </a:p>
@@ -1866,7 +1975,7 @@
 </p:notes>
 </file>
 
-<file path=ppt/notesSlides/notesSlide21.xml><?xml version="1.0" encoding="utf-8"?>
+<file path=ppt/notesSlides/notesSlide22.xml><?xml version="1.0" encoding="utf-8"?>
 <p:notes xmlns:a="http://schemas.openxmlformats.org/drawingml/2006/main" xmlns:r="http://schemas.openxmlformats.org/officeDocument/2006/relationships" xmlns:p="http://schemas.openxmlformats.org/presentationml/2006/main">
   <p:cSld>
     <p:spTree>
@@ -1955,7 +2064,7 @@
           <a:p>
             <a:fld id="{F7021451-1387-4CA6-816F-3879F97B5CBC}" type="slidenum">
               <a:rPr lang="en-US"/>
-              <a:t>21</a:t>
+              <a:t>22</a:t>
             </a:fld>
             <a:endParaRPr lang="en-US"/>
           </a:p>
@@ -7472,13 +7581,13 @@
   <p:clrMapOvr>
     <a:masterClrMapping/>
   </p:clrMapOvr>
-  <mc:AlternateContent xmlns:mc="http://schemas.openxmlformats.org/markup-compatibility/2006">
-    <mc:Choice xmlns:p14="http://schemas.microsoft.com/office/powerpoint/2010/main" Requires="p14">
+  <mc:AlternateContent xmlns:mc="http://schemas.openxmlformats.org/markup-compatibility/2006" xmlns:p14="http://schemas.microsoft.com/office/powerpoint/2010/main">
+    <mc:Choice Requires="p14">
       <p:transition spd="med" p14:dur="700">
         <p:fade/>
       </p:transition>
     </mc:Choice>
-    <mc:Fallback>
+    <mc:Fallback xmlns="">
       <p:transition spd="med">
         <p:fade/>
       </p:transition>
@@ -7619,6 +7728,433 @@
         <p:cNvPr id="1" name="">
           <a:extLst>
             <a:ext uri="{FF2B5EF4-FFF2-40B4-BE49-F238E27FC236}">
+              <a16:creationId xmlns:a16="http://schemas.microsoft.com/office/drawing/2014/main" id="{47844CB5-4885-7C71-F9B8-BF1286574BD7}"/>
+            </a:ext>
+          </a:extLst>
+        </p:cNvPr>
+        <p:cNvGrpSpPr/>
+        <p:nvPr/>
+      </p:nvGrpSpPr>
+      <p:grpSpPr>
+        <a:xfrm>
+          <a:off x="0" y="0"/>
+          <a:ext cx="0" cy="0"/>
+          <a:chOff x="0" y="0"/>
+          <a:chExt cx="0" cy="0"/>
+        </a:xfrm>
+      </p:grpSpPr>
+      <p:sp>
+        <p:nvSpPr>
+          <p:cNvPr id="4" name="TextBox 3">
+            <a:extLst>
+              <a:ext uri="{FF2B5EF4-FFF2-40B4-BE49-F238E27FC236}">
+                <a16:creationId xmlns:a16="http://schemas.microsoft.com/office/drawing/2014/main" id="{6129791B-78BE-FF3E-D6F7-FA2B1FA0CAAE}"/>
+              </a:ext>
+            </a:extLst>
+          </p:cNvPr>
+          <p:cNvSpPr txBox="1"/>
+          <p:nvPr/>
+        </p:nvSpPr>
+        <p:spPr>
+          <a:xfrm>
+            <a:off x="793790" y="2229492"/>
+            <a:ext cx="6674104" cy="3939540"/>
+          </a:xfrm>
+          <a:prstGeom prst="rect">
+            <a:avLst/>
+          </a:prstGeom>
+          <a:noFill/>
+        </p:spPr>
+        <p:txBody>
+          <a:bodyPr wrap="square" rtlCol="0">
+            <a:spAutoFit/>
+          </a:bodyPr>
+          <a:lstStyle/>
+          <a:p>
+            <a:r>
+              <a:rPr lang="en-US" sz="3600" b="1" dirty="0">
+                <a:solidFill>
+                  <a:srgbClr val="0359A6"/>
+                </a:solidFill>
+                <a:latin typeface="Times New Roman" panose="02020603050405020304" pitchFamily="18" charset="0"/>
+                <a:ea typeface="Petrona Bold" pitchFamily="34" charset="-122"/>
+                <a:cs typeface="Times New Roman" panose="02020603050405020304" pitchFamily="18" charset="0"/>
+              </a:rPr>
+              <a:t>GEXF file generation</a:t>
+            </a:r>
+            <a:endParaRPr lang="en-US" dirty="0">
+              <a:solidFill>
+                <a:srgbClr val="0359A6"/>
+              </a:solidFill>
+              <a:latin typeface="Times New Roman" panose="02020603050405020304" pitchFamily="18" charset="0"/>
+              <a:cs typeface="Times New Roman" panose="02020603050405020304" pitchFamily="18" charset="0"/>
+            </a:endParaRPr>
+          </a:p>
+          <a:p>
+            <a:endParaRPr lang="en-US" dirty="0"/>
+          </a:p>
+          <a:p>
+            <a:pPr marL="342900" indent="-342900">
+              <a:buFont typeface="Arial" panose="020B0604020202020204" pitchFamily="34" charset="0"/>
+              <a:buChar char="•"/>
+            </a:pPr>
+            <a:r>
+              <a:rPr lang="en-US" sz="2800" dirty="0" err="1">
+                <a:latin typeface="Times New Roman" panose="02020603050405020304" pitchFamily="18" charset="0"/>
+                <a:cs typeface="Times New Roman" panose="02020603050405020304" pitchFamily="18" charset="0"/>
+              </a:rPr>
+              <a:t>Gexf</a:t>
+            </a:r>
+            <a:r>
+              <a:rPr lang="en-US" sz="2800" dirty="0">
+                <a:latin typeface="Times New Roman" panose="02020603050405020304" pitchFamily="18" charset="0"/>
+                <a:cs typeface="Times New Roman" panose="02020603050405020304" pitchFamily="18" charset="0"/>
+              </a:rPr>
+              <a:t> files are used for visualizing the similarity scores</a:t>
+            </a:r>
+          </a:p>
+          <a:p>
+            <a:pPr marL="342900" indent="-342900">
+              <a:buFont typeface="Arial" panose="020B0604020202020204" pitchFamily="34" charset="0"/>
+              <a:buChar char="•"/>
+            </a:pPr>
+            <a:r>
+              <a:rPr lang="en-US" sz="2800" dirty="0">
+                <a:latin typeface="Times New Roman" panose="02020603050405020304" pitchFamily="18" charset="0"/>
+                <a:cs typeface="Times New Roman" panose="02020603050405020304" pitchFamily="18" charset="0"/>
+              </a:rPr>
+              <a:t>More similar code fragments usually sticks together</a:t>
+            </a:r>
+          </a:p>
+          <a:p>
+            <a:pPr marL="342900" indent="-342900">
+              <a:buFont typeface="Arial" panose="020B0604020202020204" pitchFamily="34" charset="0"/>
+              <a:buChar char="•"/>
+            </a:pPr>
+            <a:r>
+              <a:rPr lang="en-US" sz="2800" dirty="0">
+                <a:latin typeface="Times New Roman" panose="02020603050405020304" pitchFamily="18" charset="0"/>
+                <a:cs typeface="Times New Roman" panose="02020603050405020304" pitchFamily="18" charset="0"/>
+              </a:rPr>
+              <a:t>Force Atlas 2 algorithm is used to visualize the scenario in Gephi Graph Visualizer</a:t>
+            </a:r>
+          </a:p>
+          <a:p>
+            <a:pPr marL="342900" indent="-342900">
+              <a:buFont typeface="Arial" panose="020B0604020202020204" pitchFamily="34" charset="0"/>
+              <a:buChar char="•"/>
+            </a:pPr>
+            <a:endParaRPr lang="en-US" sz="2800" dirty="0">
+              <a:solidFill>
+                <a:srgbClr val="0359A6"/>
+              </a:solidFill>
+              <a:latin typeface="Times New Roman" panose="02020603050405020304" pitchFamily="18" charset="0"/>
+              <a:cs typeface="Times New Roman" panose="02020603050405020304" pitchFamily="18" charset="0"/>
+            </a:endParaRPr>
+          </a:p>
+        </p:txBody>
+      </p:sp>
+      <p:sp>
+        <p:nvSpPr>
+          <p:cNvPr id="5" name="Rectangle 4">
+            <a:extLst>
+              <a:ext uri="{FF2B5EF4-FFF2-40B4-BE49-F238E27FC236}">
+                <a16:creationId xmlns:a16="http://schemas.microsoft.com/office/drawing/2014/main" id="{329BE27C-74F1-0FF3-D9C9-8EF465AD5353}"/>
+              </a:ext>
+            </a:extLst>
+          </p:cNvPr>
+          <p:cNvSpPr/>
+          <p:nvPr/>
+        </p:nvSpPr>
+        <p:spPr>
+          <a:xfrm>
+            <a:off x="782174" y="540065"/>
+            <a:ext cx="13066052" cy="848950"/>
+          </a:xfrm>
+          <a:prstGeom prst="rect">
+            <a:avLst/>
+          </a:prstGeom>
+          <a:noFill/>
+        </p:spPr>
+        <p:txBody>
+          <a:bodyPr wrap="square" lIns="91440" tIns="45720" rIns="91440" bIns="45720">
+            <a:spAutoFit/>
+          </a:bodyPr>
+          <a:lstStyle/>
+          <a:p>
+            <a:pPr>
+              <a:lnSpc>
+                <a:spcPts val="5850"/>
+              </a:lnSpc>
+            </a:pPr>
+            <a:r>
+              <a:rPr lang="en-US" sz="5400" b="1" dirty="0">
+                <a:solidFill>
+                  <a:srgbClr val="0359A6"/>
+                </a:solidFill>
+                <a:latin typeface="Times New Roman" panose="02020603050405020304" pitchFamily="18" charset="0"/>
+                <a:ea typeface="Petrona Bold"/>
+                <a:cs typeface="Times New Roman" panose="02020603050405020304" pitchFamily="18" charset="0"/>
+              </a:rPr>
+              <a:t>Post-mid Implementation</a:t>
+            </a:r>
+            <a:endParaRPr lang="en-US" sz="5400" dirty="0">
+              <a:solidFill>
+                <a:srgbClr val="0359A6"/>
+              </a:solidFill>
+              <a:latin typeface="Times New Roman" panose="02020603050405020304" pitchFamily="18" charset="0"/>
+              <a:ea typeface="Petrona Bold"/>
+              <a:cs typeface="Times New Roman" panose="02020603050405020304" pitchFamily="18" charset="0"/>
+            </a:endParaRPr>
+          </a:p>
+        </p:txBody>
+      </p:sp>
+      <p:sp>
+        <p:nvSpPr>
+          <p:cNvPr id="26" name="Date Placeholder 25">
+            <a:extLst>
+              <a:ext uri="{FF2B5EF4-FFF2-40B4-BE49-F238E27FC236}">
+                <a16:creationId xmlns:a16="http://schemas.microsoft.com/office/drawing/2014/main" id="{8D0F0673-7A5D-59EC-0083-96E7CFC2AAE8}"/>
+              </a:ext>
+            </a:extLst>
+          </p:cNvPr>
+          <p:cNvSpPr>
+            <a:spLocks noGrp="1"/>
+          </p:cNvSpPr>
+          <p:nvPr>
+            <p:ph type="dt" sz="half" idx="10"/>
+          </p:nvPr>
+        </p:nvSpPr>
+        <p:spPr/>
+        <p:txBody>
+          <a:bodyPr/>
+          <a:lstStyle/>
+          <a:p>
+            <a:fld id="{4EB1E66D-D798-45AE-8E62-8CC2B15FDAA6}" type="datetime1">
+              <a:rPr lang="en-US" smtClean="0"/>
+              <a:t>4/23/2026</a:t>
+            </a:fld>
+            <a:endParaRPr lang="en-US"/>
+          </a:p>
+        </p:txBody>
+      </p:sp>
+      <p:sp>
+        <p:nvSpPr>
+          <p:cNvPr id="28" name="Slide Number Placeholder 27">
+            <a:extLst>
+              <a:ext uri="{FF2B5EF4-FFF2-40B4-BE49-F238E27FC236}">
+                <a16:creationId xmlns:a16="http://schemas.microsoft.com/office/drawing/2014/main" id="{18C63B9A-5F88-E9D0-3A59-C99D9093748D}"/>
+              </a:ext>
+            </a:extLst>
+          </p:cNvPr>
+          <p:cNvSpPr>
+            <a:spLocks noGrp="1"/>
+          </p:cNvSpPr>
+          <p:nvPr>
+            <p:ph type="sldNum" sz="quarter" idx="12"/>
+          </p:nvPr>
+        </p:nvSpPr>
+        <p:spPr/>
+        <p:txBody>
+          <a:bodyPr/>
+          <a:lstStyle/>
+          <a:p>
+            <a:fld id="{D6477167-E697-4EBC-B8EC-2672F922F3D4}" type="slidenum">
+              <a:rPr lang="en-US" smtClean="0"/>
+              <a:pPr/>
+              <a:t>11</a:t>
+            </a:fld>
+            <a:endParaRPr lang="en-US" dirty="0"/>
+          </a:p>
+        </p:txBody>
+      </p:sp>
+      <p:pic>
+        <p:nvPicPr>
+          <p:cNvPr id="2" name="Picture 1">
+            <a:extLst>
+              <a:ext uri="{FF2B5EF4-FFF2-40B4-BE49-F238E27FC236}">
+                <a16:creationId xmlns:a16="http://schemas.microsoft.com/office/drawing/2014/main" id="{44F21783-D269-43D0-56CB-39D68B8F77C4}"/>
+              </a:ext>
+            </a:extLst>
+          </p:cNvPr>
+          <p:cNvPicPr>
+            <a:picLocks noChangeAspect="1"/>
+          </p:cNvPicPr>
+          <p:nvPr/>
+        </p:nvPicPr>
+        <p:blipFill>
+          <a:blip r:embed="rId3"/>
+          <a:stretch>
+            <a:fillRect/>
+          </a:stretch>
+        </p:blipFill>
+        <p:spPr>
+          <a:xfrm>
+            <a:off x="8123260" y="1583325"/>
+            <a:ext cx="5845512" cy="5068935"/>
+          </a:xfrm>
+          <a:prstGeom prst="rect">
+            <a:avLst/>
+          </a:prstGeom>
+        </p:spPr>
+      </p:pic>
+    </p:spTree>
+    <p:extLst>
+      <p:ext uri="{BB962C8B-B14F-4D97-AF65-F5344CB8AC3E}">
+        <p14:creationId xmlns:p14="http://schemas.microsoft.com/office/powerpoint/2010/main" val="1269262816"/>
+      </p:ext>
+    </p:extLst>
+  </p:cSld>
+  <p:clrMapOvr>
+    <a:masterClrMapping/>
+  </p:clrMapOvr>
+  <mc:AlternateContent xmlns:mc="http://schemas.openxmlformats.org/markup-compatibility/2006">
+    <mc:Choice xmlns:p14="http://schemas.microsoft.com/office/powerpoint/2010/main" Requires="p14">
+      <p:transition spd="med" p14:dur="700">
+        <p:fade/>
+      </p:transition>
+    </mc:Choice>
+    <mc:Fallback>
+      <p:transition spd="med">
+        <p:fade/>
+      </p:transition>
+    </mc:Fallback>
+  </mc:AlternateContent>
+  <p:timing>
+    <p:tnLst>
+      <p:par>
+        <p:cTn id="1" dur="indefinite" restart="never" nodeType="tmRoot">
+          <p:childTnLst>
+            <p:seq concurrent="1" nextAc="seek">
+              <p:cTn id="2" dur="indefinite" nodeType="mainSeq">
+                <p:childTnLst>
+                  <p:par>
+                    <p:cTn id="3" fill="hold">
+                      <p:stCondLst>
+                        <p:cond delay="indefinite"/>
+                        <p:cond evt="onBegin" delay="0">
+                          <p:tn val="2"/>
+                        </p:cond>
+                      </p:stCondLst>
+                      <p:childTnLst>
+                        <p:par>
+                          <p:cTn id="4" fill="hold">
+                            <p:stCondLst>
+                              <p:cond delay="0"/>
+                            </p:stCondLst>
+                            <p:childTnLst>
+                              <p:par>
+                                <p:cTn id="5" presetID="10" presetClass="entr" presetSubtype="0" fill="hold" grpId="0" nodeType="afterEffect">
+                                  <p:stCondLst>
+                                    <p:cond delay="0"/>
+                                  </p:stCondLst>
+                                  <p:childTnLst>
+                                    <p:set>
+                                      <p:cBhvr>
+                                        <p:cTn id="6" dur="1" fill="hold">
+                                          <p:stCondLst>
+                                            <p:cond delay="0"/>
+                                          </p:stCondLst>
+                                        </p:cTn>
+                                        <p:tgtEl>
+                                          <p:spTgt spid="4"/>
+                                        </p:tgtEl>
+                                        <p:attrNameLst>
+                                          <p:attrName>style.visibility</p:attrName>
+                                        </p:attrNameLst>
+                                      </p:cBhvr>
+                                      <p:to>
+                                        <p:strVal val="visible"/>
+                                      </p:to>
+                                    </p:set>
+                                    <p:animEffect transition="in" filter="fade">
+                                      <p:cBhvr>
+                                        <p:cTn id="7" dur="500"/>
+                                        <p:tgtEl>
+                                          <p:spTgt spid="4"/>
+                                        </p:tgtEl>
+                                      </p:cBhvr>
+                                    </p:animEffect>
+                                  </p:childTnLst>
+                                </p:cTn>
+                              </p:par>
+                              <p:par>
+                                <p:cTn id="8" presetID="10" presetClass="entr" presetSubtype="0" fill="hold" nodeType="withEffect">
+                                  <p:stCondLst>
+                                    <p:cond delay="0"/>
+                                  </p:stCondLst>
+                                  <p:childTnLst>
+                                    <p:set>
+                                      <p:cBhvr>
+                                        <p:cTn id="9" dur="1" fill="hold">
+                                          <p:stCondLst>
+                                            <p:cond delay="0"/>
+                                          </p:stCondLst>
+                                        </p:cTn>
+                                        <p:tgtEl>
+                                          <p:spTgt spid="2"/>
+                                        </p:tgtEl>
+                                        <p:attrNameLst>
+                                          <p:attrName>style.visibility</p:attrName>
+                                        </p:attrNameLst>
+                                      </p:cBhvr>
+                                      <p:to>
+                                        <p:strVal val="visible"/>
+                                      </p:to>
+                                    </p:set>
+                                    <p:animEffect transition="in" filter="fade">
+                                      <p:cBhvr>
+                                        <p:cTn id="10" dur="500"/>
+                                        <p:tgtEl>
+                                          <p:spTgt spid="2"/>
+                                        </p:tgtEl>
+                                      </p:cBhvr>
+                                    </p:animEffect>
+                                  </p:childTnLst>
+                                </p:cTn>
+                              </p:par>
+                            </p:childTnLst>
+                          </p:cTn>
+                        </p:par>
+                      </p:childTnLst>
+                    </p:cTn>
+                  </p:par>
+                </p:childTnLst>
+              </p:cTn>
+              <p:prevCondLst>
+                <p:cond evt="onPrev" delay="0">
+                  <p:tgtEl>
+                    <p:sldTgt/>
+                  </p:tgtEl>
+                </p:cond>
+              </p:prevCondLst>
+              <p:nextCondLst>
+                <p:cond evt="onNext" delay="0">
+                  <p:tgtEl>
+                    <p:sldTgt/>
+                  </p:tgtEl>
+                </p:cond>
+              </p:nextCondLst>
+            </p:seq>
+          </p:childTnLst>
+        </p:cTn>
+      </p:par>
+    </p:tnLst>
+    <p:bldLst>
+      <p:bldP spid="4" grpId="0"/>
+    </p:bldLst>
+  </p:timing>
+</p:sld>
+</file>
+
+<file path=ppt/slides/slide12.xml><?xml version="1.0" encoding="utf-8"?>
+<p:sld xmlns:a="http://schemas.openxmlformats.org/drawingml/2006/main" xmlns:r="http://schemas.openxmlformats.org/officeDocument/2006/relationships" xmlns:p="http://schemas.openxmlformats.org/presentationml/2006/main">
+  <p:cSld>
+    <p:spTree>
+      <p:nvGrpSpPr>
+        <p:cNvPr id="1" name="">
+          <a:extLst>
+            <a:ext uri="{FF2B5EF4-FFF2-40B4-BE49-F238E27FC236}">
               <a16:creationId xmlns:a16="http://schemas.microsoft.com/office/drawing/2014/main" id="{7890B3DF-C54F-BBEF-DE12-287769578BB7}"/>
             </a:ext>
           </a:extLst>
@@ -7990,7 +8526,7 @@
             <a:fld id="{D6477167-E697-4EBC-B8EC-2672F922F3D4}" type="slidenum">
               <a:rPr lang="en-US" smtClean="0"/>
               <a:pPr/>
-              <a:t>11</a:t>
+              <a:t>12</a:t>
             </a:fld>
             <a:endParaRPr lang="en-US" dirty="0"/>
           </a:p>
@@ -8155,7 +8691,7 @@
 </p:sld>
 </file>
 
-<file path=ppt/slides/slide12.xml><?xml version="1.0" encoding="utf-8"?>
+<file path=ppt/slides/slide13.xml><?xml version="1.0" encoding="utf-8"?>
 <p:sld xmlns:a="http://schemas.openxmlformats.org/drawingml/2006/main" xmlns:r="http://schemas.openxmlformats.org/officeDocument/2006/relationships" xmlns:p="http://schemas.openxmlformats.org/presentationml/2006/main">
   <p:cSld>
     <p:spTree>
@@ -9651,7 +10187,7 @@
             <a:fld id="{D6477167-E697-4EBC-B8EC-2672F922F3D4}" type="slidenum">
               <a:rPr lang="en-US" smtClean="0"/>
               <a:pPr/>
-              <a:t>12</a:t>
+              <a:t>13</a:t>
             </a:fld>
             <a:endParaRPr lang="en-US" dirty="0"/>
           </a:p>
@@ -10016,7 +10552,7 @@
 </p:sld>
 </file>
 
-<file path=ppt/slides/slide13.xml><?xml version="1.0" encoding="utf-8"?>
+<file path=ppt/slides/slide14.xml><?xml version="1.0" encoding="utf-8"?>
 <p:sld xmlns:a="http://schemas.openxmlformats.org/drawingml/2006/main" xmlns:r="http://schemas.openxmlformats.org/officeDocument/2006/relationships" xmlns:p="http://schemas.openxmlformats.org/presentationml/2006/main">
   <p:cSld>
     <p:spTree>
@@ -10237,7 +10773,7 @@
             <a:fld id="{D6477167-E697-4EBC-B8EC-2672F922F3D4}" type="slidenum">
               <a:rPr lang="en-US" smtClean="0"/>
               <a:pPr/>
-              <a:t>13</a:t>
+              <a:t>14</a:t>
             </a:fld>
             <a:endParaRPr lang="en-US" dirty="0"/>
           </a:p>
@@ -10392,7 +10928,7 @@
 </p:sld>
 </file>
 
-<file path=ppt/slides/slide14.xml><?xml version="1.0" encoding="utf-8"?>
+<file path=ppt/slides/slide15.xml><?xml version="1.0" encoding="utf-8"?>
 <p:sld xmlns:a="http://schemas.openxmlformats.org/drawingml/2006/main" xmlns:r="http://schemas.openxmlformats.org/officeDocument/2006/relationships" xmlns:p="http://schemas.openxmlformats.org/presentationml/2006/main">
   <p:cSld>
     <p:spTree>
@@ -10592,7 +11128,7 @@
             <a:fld id="{D6477167-E697-4EBC-B8EC-2672F922F3D4}" type="slidenum">
               <a:rPr lang="en-US" smtClean="0"/>
               <a:pPr/>
-              <a:t>14</a:t>
+              <a:t>15</a:t>
             </a:fld>
             <a:endParaRPr lang="en-US" dirty="0"/>
           </a:p>
@@ -10623,7 +11159,7 @@
 </p:sld>
 </file>
 
-<file path=ppt/slides/slide15.xml><?xml version="1.0" encoding="utf-8"?>
+<file path=ppt/slides/slide16.xml><?xml version="1.0" encoding="utf-8"?>
 <p:sld xmlns:a="http://schemas.openxmlformats.org/drawingml/2006/main" xmlns:r="http://schemas.openxmlformats.org/officeDocument/2006/relationships" xmlns:p="http://schemas.openxmlformats.org/presentationml/2006/main">
   <p:cSld>
     <p:spTree>
@@ -10837,7 +11373,7 @@
             <a:fld id="{D6477167-E697-4EBC-B8EC-2672F922F3D4}" type="slidenum">
               <a:rPr lang="en-US" smtClean="0"/>
               <a:pPr/>
-              <a:t>15</a:t>
+              <a:t>16</a:t>
             </a:fld>
             <a:endParaRPr lang="en-US" dirty="0"/>
           </a:p>
@@ -10853,13 +11389,13 @@
   <p:clrMapOvr>
     <a:masterClrMapping/>
   </p:clrMapOvr>
-  <mc:AlternateContent xmlns:mc="http://schemas.openxmlformats.org/markup-compatibility/2006">
-    <mc:Choice xmlns:p14="http://schemas.microsoft.com/office/powerpoint/2010/main" Requires="p14">
+  <mc:AlternateContent xmlns:mc="http://schemas.openxmlformats.org/markup-compatibility/2006" xmlns:p14="http://schemas.microsoft.com/office/powerpoint/2010/main">
+    <mc:Choice Requires="p14">
       <p:transition spd="med" p14:dur="700">
         <p:fade/>
       </p:transition>
     </mc:Choice>
-    <mc:Fallback>
+    <mc:Fallback xmlns="">
       <p:transition spd="med">
         <p:fade/>
       </p:transition>
@@ -10868,7 +11404,7 @@
 </p:sld>
 </file>
 
-<file path=ppt/slides/slide16.xml><?xml version="1.0" encoding="utf-8"?>
+<file path=ppt/slides/slide17.xml><?xml version="1.0" encoding="utf-8"?>
 <p:sld xmlns:a="http://schemas.openxmlformats.org/drawingml/2006/main" xmlns:r="http://schemas.openxmlformats.org/officeDocument/2006/relationships" xmlns:p="http://schemas.openxmlformats.org/presentationml/2006/main">
   <p:cSld>
     <p:spTree>
@@ -11423,7 +11959,7 @@
             <a:fld id="{D6477167-E697-4EBC-B8EC-2672F922F3D4}" type="slidenum">
               <a:rPr lang="en-US" smtClean="0"/>
               <a:pPr/>
-              <a:t>16</a:t>
+              <a:t>17</a:t>
             </a:fld>
             <a:endParaRPr lang="en-US" dirty="0"/>
           </a:p>
@@ -11439,13 +11975,13 @@
   <p:clrMapOvr>
     <a:masterClrMapping/>
   </p:clrMapOvr>
-  <mc:AlternateContent xmlns:mc="http://schemas.openxmlformats.org/markup-compatibility/2006">
-    <mc:Choice xmlns:p14="http://schemas.microsoft.com/office/powerpoint/2010/main" Requires="p14">
+  <mc:AlternateContent xmlns:mc="http://schemas.openxmlformats.org/markup-compatibility/2006" xmlns:p14="http://schemas.microsoft.com/office/powerpoint/2010/main">
+    <mc:Choice Requires="p14">
       <p:transition spd="med" p14:dur="700">
         <p:fade/>
       </p:transition>
     </mc:Choice>
-    <mc:Fallback>
+    <mc:Fallback xmlns="">
       <p:transition spd="med">
         <p:fade/>
       </p:transition>
@@ -11454,7 +11990,7 @@
 </p:sld>
 </file>
 
-<file path=ppt/slides/slide17.xml><?xml version="1.0" encoding="utf-8"?>
+<file path=ppt/slides/slide18.xml><?xml version="1.0" encoding="utf-8"?>
 <p:sld xmlns:a="http://schemas.openxmlformats.org/drawingml/2006/main" xmlns:r="http://schemas.openxmlformats.org/officeDocument/2006/relationships" xmlns:p="http://schemas.openxmlformats.org/presentationml/2006/main">
   <p:cSld>
     <p:spTree>
@@ -11719,7 +12255,7 @@
             <a:fld id="{D6477167-E697-4EBC-B8EC-2672F922F3D4}" type="slidenum">
               <a:rPr lang="en-US" smtClean="0"/>
               <a:pPr/>
-              <a:t>17</a:t>
+              <a:t>18</a:t>
             </a:fld>
             <a:endParaRPr lang="en-US" dirty="0"/>
           </a:p>
@@ -11735,13 +12271,13 @@
   <p:clrMapOvr>
     <a:masterClrMapping/>
   </p:clrMapOvr>
-  <mc:AlternateContent xmlns:mc="http://schemas.openxmlformats.org/markup-compatibility/2006">
-    <mc:Choice xmlns:p14="http://schemas.microsoft.com/office/powerpoint/2010/main" Requires="p14">
+  <mc:AlternateContent xmlns:mc="http://schemas.openxmlformats.org/markup-compatibility/2006" xmlns:p14="http://schemas.microsoft.com/office/powerpoint/2010/main">
+    <mc:Choice Requires="p14">
       <p:transition spd="med" p14:dur="700">
         <p:fade/>
       </p:transition>
     </mc:Choice>
-    <mc:Fallback>
+    <mc:Fallback xmlns="">
       <p:transition spd="med">
         <p:fade/>
       </p:transition>
@@ -11884,7 +12420,7 @@
 </p:sld>
 </file>
 
-<file path=ppt/slides/slide18.xml><?xml version="1.0" encoding="utf-8"?>
+<file path=ppt/slides/slide19.xml><?xml version="1.0" encoding="utf-8"?>
 <p:sld xmlns:a="http://schemas.openxmlformats.org/drawingml/2006/main" xmlns:r="http://schemas.openxmlformats.org/officeDocument/2006/relationships" xmlns:p="http://schemas.openxmlformats.org/presentationml/2006/main">
   <p:cSld>
     <p:spTree>
@@ -12025,7 +12561,7 @@
             <a:fld id="{D6477167-E697-4EBC-B8EC-2672F922F3D4}" type="slidenum">
               <a:rPr lang="en-US" smtClean="0"/>
               <a:pPr/>
-              <a:t>18</a:t>
+              <a:t>19</a:t>
             </a:fld>
             <a:endParaRPr lang="en-US" dirty="0"/>
           </a:p>
@@ -12145,7 +12681,421 @@
 </p:sld>
 </file>
 
-<file path=ppt/slides/slide19.xml><?xml version="1.0" encoding="utf-8"?>
+<file path=ppt/slides/slide2.xml><?xml version="1.0" encoding="utf-8"?>
+<p:sld xmlns:a="http://schemas.openxmlformats.org/drawingml/2006/main" xmlns:r="http://schemas.openxmlformats.org/officeDocument/2006/relationships" xmlns:p="http://schemas.openxmlformats.org/presentationml/2006/main">
+  <p:cSld>
+    <p:spTree>
+      <p:nvGrpSpPr>
+        <p:cNvPr id="1" name="">
+          <a:extLst>
+            <a:ext uri="{FF2B5EF4-FFF2-40B4-BE49-F238E27FC236}">
+              <a16:creationId xmlns:a16="http://schemas.microsoft.com/office/drawing/2014/main" id="{9242C76D-3A47-444C-8B28-2485B50539CB}"/>
+            </a:ext>
+          </a:extLst>
+        </p:cNvPr>
+        <p:cNvGrpSpPr/>
+        <p:nvPr/>
+      </p:nvGrpSpPr>
+      <p:grpSpPr>
+        <a:xfrm>
+          <a:off x="0" y="0"/>
+          <a:ext cx="0" cy="0"/>
+          <a:chOff x="0" y="0"/>
+          <a:chExt cx="0" cy="0"/>
+        </a:xfrm>
+      </p:grpSpPr>
+      <p:sp>
+        <p:nvSpPr>
+          <p:cNvPr id="7" name="Rectangle 6">
+            <a:extLst>
+              <a:ext uri="{FF2B5EF4-FFF2-40B4-BE49-F238E27FC236}">
+                <a16:creationId xmlns:a16="http://schemas.microsoft.com/office/drawing/2014/main" id="{EBBC7743-7A38-0C99-86CD-EC89D8C83736}"/>
+              </a:ext>
+            </a:extLst>
+          </p:cNvPr>
+          <p:cNvSpPr/>
+          <p:nvPr/>
+        </p:nvSpPr>
+        <p:spPr>
+          <a:xfrm>
+            <a:off x="773829" y="328120"/>
+            <a:ext cx="9078447" cy="848950"/>
+          </a:xfrm>
+          <a:prstGeom prst="rect">
+            <a:avLst/>
+          </a:prstGeom>
+          <a:noFill/>
+        </p:spPr>
+        <p:txBody>
+          <a:bodyPr wrap="none" lIns="91440" tIns="45720" rIns="91440" bIns="45720">
+            <a:spAutoFit/>
+          </a:bodyPr>
+          <a:lstStyle/>
+          <a:p>
+            <a:pPr algn="ctr">
+              <a:lnSpc>
+                <a:spcPts val="5850"/>
+              </a:lnSpc>
+            </a:pPr>
+            <a:r>
+              <a:rPr lang="en-US" sz="5400" b="1" dirty="0">
+                <a:solidFill>
+                  <a:srgbClr val="0359A6"/>
+                </a:solidFill>
+                <a:latin typeface="Times New Roman" panose="02020603050405020304" pitchFamily="18" charset="0"/>
+                <a:ea typeface="Petrona Bold" pitchFamily="34" charset="-122"/>
+                <a:cs typeface="Times New Roman" panose="02020603050405020304" pitchFamily="18" charset="0"/>
+              </a:rPr>
+              <a:t>Project Description – “Why?”</a:t>
+            </a:r>
+            <a:endParaRPr lang="en-US" sz="5400" dirty="0">
+              <a:solidFill>
+                <a:srgbClr val="0359A6"/>
+              </a:solidFill>
+              <a:latin typeface="Times New Roman" panose="02020603050405020304" pitchFamily="18" charset="0"/>
+              <a:cs typeface="Times New Roman" panose="02020603050405020304" pitchFamily="18" charset="0"/>
+            </a:endParaRPr>
+          </a:p>
+        </p:txBody>
+      </p:sp>
+      <p:sp>
+        <p:nvSpPr>
+          <p:cNvPr id="2" name="Date Placeholder 1">
+            <a:extLst>
+              <a:ext uri="{FF2B5EF4-FFF2-40B4-BE49-F238E27FC236}">
+                <a16:creationId xmlns:a16="http://schemas.microsoft.com/office/drawing/2014/main" id="{28332DD2-54CB-46E7-9080-47B2B0A4B22A}"/>
+              </a:ext>
+            </a:extLst>
+          </p:cNvPr>
+          <p:cNvSpPr>
+            <a:spLocks noGrp="1"/>
+          </p:cNvSpPr>
+          <p:nvPr>
+            <p:ph type="dt" sz="half" idx="10"/>
+          </p:nvPr>
+        </p:nvSpPr>
+        <p:spPr/>
+        <p:txBody>
+          <a:bodyPr/>
+          <a:lstStyle/>
+          <a:p>
+            <a:fld id="{66177986-49C3-4761-8392-D13F3E990A0C}" type="datetime1">
+              <a:rPr lang="en-US" smtClean="0"/>
+              <a:t>4/23/2026</a:t>
+            </a:fld>
+            <a:endParaRPr lang="en-US"/>
+          </a:p>
+        </p:txBody>
+      </p:sp>
+      <p:sp>
+        <p:nvSpPr>
+          <p:cNvPr id="3" name="Slide Number Placeholder 2">
+            <a:extLst>
+              <a:ext uri="{FF2B5EF4-FFF2-40B4-BE49-F238E27FC236}">
+                <a16:creationId xmlns:a16="http://schemas.microsoft.com/office/drawing/2014/main" id="{3EE9D753-7AE1-DA76-6663-11DAE7BC6722}"/>
+              </a:ext>
+            </a:extLst>
+          </p:cNvPr>
+          <p:cNvSpPr>
+            <a:spLocks noGrp="1"/>
+          </p:cNvSpPr>
+          <p:nvPr>
+            <p:ph type="sldNum" sz="quarter" idx="12"/>
+          </p:nvPr>
+        </p:nvSpPr>
+        <p:spPr/>
+        <p:txBody>
+          <a:bodyPr/>
+          <a:lstStyle/>
+          <a:p>
+            <a:fld id="{D6477167-E697-4EBC-B8EC-2672F922F3D4}" type="slidenum">
+              <a:rPr lang="en-US" smtClean="0"/>
+              <a:pPr/>
+              <a:t>2</a:t>
+            </a:fld>
+            <a:endParaRPr lang="en-US" dirty="0"/>
+          </a:p>
+        </p:txBody>
+      </p:sp>
+      <p:sp>
+        <p:nvSpPr>
+          <p:cNvPr id="8" name="TextBox 7">
+            <a:extLst>
+              <a:ext uri="{FF2B5EF4-FFF2-40B4-BE49-F238E27FC236}">
+                <a16:creationId xmlns:a16="http://schemas.microsoft.com/office/drawing/2014/main" id="{4CDCA282-1FCA-9E2E-47C0-5548540E854E}"/>
+              </a:ext>
+            </a:extLst>
+          </p:cNvPr>
+          <p:cNvSpPr txBox="1"/>
+          <p:nvPr/>
+        </p:nvSpPr>
+        <p:spPr>
+          <a:xfrm>
+            <a:off x="793790" y="1762564"/>
+            <a:ext cx="8525308" cy="3939540"/>
+          </a:xfrm>
+          <a:prstGeom prst="rect">
+            <a:avLst/>
+          </a:prstGeom>
+          <a:noFill/>
+        </p:spPr>
+        <p:txBody>
+          <a:bodyPr wrap="square" rtlCol="0">
+            <a:spAutoFit/>
+          </a:bodyPr>
+          <a:lstStyle/>
+          <a:p>
+            <a:r>
+              <a:rPr lang="en-US" sz="3600" b="1" dirty="0">
+                <a:solidFill>
+                  <a:srgbClr val="0359A6"/>
+                </a:solidFill>
+                <a:latin typeface="Times New Roman" panose="02020603050405020304" pitchFamily="18" charset="0"/>
+                <a:ea typeface="Petrona Bold" pitchFamily="34" charset="-122"/>
+                <a:cs typeface="Times New Roman" panose="02020603050405020304" pitchFamily="18" charset="0"/>
+              </a:rPr>
+              <a:t>Why Image-Based Clone Detection?</a:t>
+            </a:r>
+            <a:endParaRPr lang="en-US" dirty="0">
+              <a:solidFill>
+                <a:srgbClr val="0359A6"/>
+              </a:solidFill>
+              <a:latin typeface="Times New Roman" panose="02020603050405020304" pitchFamily="18" charset="0"/>
+              <a:cs typeface="Times New Roman" panose="02020603050405020304" pitchFamily="18" charset="0"/>
+            </a:endParaRPr>
+          </a:p>
+          <a:p>
+            <a:endParaRPr lang="en-US" dirty="0"/>
+          </a:p>
+          <a:p>
+            <a:pPr marL="342900" indent="-342900">
+              <a:buFont typeface="Arial" panose="020B0604020202020204" pitchFamily="34" charset="0"/>
+              <a:buChar char="•"/>
+            </a:pPr>
+            <a:r>
+              <a:rPr lang="en-US" sz="2800" dirty="0"/>
+              <a:t>Language-independent approach</a:t>
+            </a:r>
+          </a:p>
+          <a:p>
+            <a:pPr marL="342900" indent="-342900">
+              <a:buFont typeface="Arial" panose="020B0604020202020204" pitchFamily="34" charset="0"/>
+              <a:buChar char="•"/>
+            </a:pPr>
+            <a:r>
+              <a:rPr lang="en-US" sz="2800" dirty="0"/>
+              <a:t>Captures structural similarity visually</a:t>
+            </a:r>
+          </a:p>
+          <a:p>
+            <a:pPr marL="342900" indent="-342900">
+              <a:buFont typeface="Arial" panose="020B0604020202020204" pitchFamily="34" charset="0"/>
+              <a:buChar char="•"/>
+            </a:pPr>
+            <a:r>
+              <a:rPr lang="en-US" sz="2800" dirty="0"/>
+              <a:t>Robust to:</a:t>
+            </a:r>
+          </a:p>
+          <a:p>
+            <a:pPr marL="800100" lvl="1" indent="-342900">
+              <a:buFont typeface="Arial" panose="020B0604020202020204" pitchFamily="34" charset="0"/>
+              <a:buChar char="•"/>
+            </a:pPr>
+            <a:r>
+              <a:rPr lang="en-US" sz="2800" dirty="0"/>
+              <a:t>Variable renaming</a:t>
+            </a:r>
+          </a:p>
+          <a:p>
+            <a:pPr marL="800100" lvl="1" indent="-342900">
+              <a:buFont typeface="Arial" panose="020B0604020202020204" pitchFamily="34" charset="0"/>
+              <a:buChar char="•"/>
+            </a:pPr>
+            <a:r>
+              <a:rPr lang="en-US" sz="2800" dirty="0"/>
+              <a:t>Formatting changes</a:t>
+            </a:r>
+          </a:p>
+          <a:p>
+            <a:pPr marL="800100" lvl="1" indent="-342900">
+              <a:buFont typeface="Arial" panose="020B0604020202020204" pitchFamily="34" charset="0"/>
+              <a:buChar char="•"/>
+            </a:pPr>
+            <a:endParaRPr lang="en-US" sz="2800" dirty="0"/>
+          </a:p>
+          <a:p>
+            <a:pPr marL="342900" indent="-342900">
+              <a:buFont typeface="Arial" panose="020B0604020202020204" pitchFamily="34" charset="0"/>
+              <a:buChar char="•"/>
+            </a:pPr>
+            <a:r>
+              <a:rPr lang="en-US" sz="2800" dirty="0"/>
+              <a:t>Goes beyond traditional text-based detection</a:t>
+            </a:r>
+          </a:p>
+        </p:txBody>
+      </p:sp>
+    </p:spTree>
+    <p:extLst>
+      <p:ext uri="{BB962C8B-B14F-4D97-AF65-F5344CB8AC3E}">
+        <p14:creationId xmlns:p14="http://schemas.microsoft.com/office/powerpoint/2010/main" val="1502835694"/>
+      </p:ext>
+    </p:extLst>
+  </p:cSld>
+  <p:clrMapOvr>
+    <a:masterClrMapping/>
+  </p:clrMapOvr>
+  <mc:AlternateContent xmlns:mc="http://schemas.openxmlformats.org/markup-compatibility/2006" xmlns:p14="http://schemas.microsoft.com/office/powerpoint/2010/main">
+    <mc:Choice Requires="p14">
+      <p:transition spd="med" p14:dur="700">
+        <p:fade/>
+      </p:transition>
+    </mc:Choice>
+    <mc:Fallback xmlns="">
+      <p:transition spd="med">
+        <p:fade/>
+      </p:transition>
+    </mc:Fallback>
+  </mc:AlternateContent>
+  <p:timing>
+    <p:tnLst>
+      <p:par>
+        <p:cTn id="1" dur="indefinite" restart="never" nodeType="tmRoot">
+          <p:childTnLst>
+            <p:seq concurrent="1" nextAc="seek">
+              <p:cTn id="2" dur="indefinite" nodeType="mainSeq">
+                <p:childTnLst>
+                  <p:par>
+                    <p:cTn id="3" fill="hold">
+                      <p:stCondLst>
+                        <p:cond delay="indefinite"/>
+                        <p:cond evt="onBegin" delay="0">
+                          <p:tn val="2"/>
+                        </p:cond>
+                      </p:stCondLst>
+                      <p:childTnLst>
+                        <p:par>
+                          <p:cTn id="4" fill="hold">
+                            <p:stCondLst>
+                              <p:cond delay="0"/>
+                            </p:stCondLst>
+                            <p:childTnLst>
+                              <p:par>
+                                <p:cTn id="5" presetID="10" presetClass="entr" presetSubtype="0" fill="hold" grpId="0" nodeType="withEffect">
+                                  <p:stCondLst>
+                                    <p:cond delay="0"/>
+                                  </p:stCondLst>
+                                  <p:childTnLst>
+                                    <p:set>
+                                      <p:cBhvr>
+                                        <p:cTn id="6" dur="1" fill="hold">
+                                          <p:stCondLst>
+                                            <p:cond delay="0"/>
+                                          </p:stCondLst>
+                                        </p:cTn>
+                                        <p:tgtEl>
+                                          <p:spTgt spid="7"/>
+                                        </p:tgtEl>
+                                        <p:attrNameLst>
+                                          <p:attrName>style.visibility</p:attrName>
+                                        </p:attrNameLst>
+                                      </p:cBhvr>
+                                      <p:to>
+                                        <p:strVal val="visible"/>
+                                      </p:to>
+                                    </p:set>
+                                    <p:animEffect transition="in" filter="fade">
+                                      <p:cBhvr>
+                                        <p:cTn id="7" dur="500"/>
+                                        <p:tgtEl>
+                                          <p:spTgt spid="7"/>
+                                        </p:tgtEl>
+                                      </p:cBhvr>
+                                    </p:animEffect>
+                                  </p:childTnLst>
+                                </p:cTn>
+                              </p:par>
+                            </p:childTnLst>
+                          </p:cTn>
+                        </p:par>
+                        <p:par>
+                          <p:cTn id="8" fill="hold">
+                            <p:stCondLst>
+                              <p:cond delay="500"/>
+                            </p:stCondLst>
+                            <p:childTnLst>
+                              <p:par>
+                                <p:cTn id="9" presetID="10" presetClass="entr" presetSubtype="0" fill="hold" grpId="0" nodeType="afterEffect">
+                                  <p:stCondLst>
+                                    <p:cond delay="0"/>
+                                  </p:stCondLst>
+                                  <p:childTnLst>
+                                    <p:set>
+                                      <p:cBhvr>
+                                        <p:cTn id="10" dur="1" fill="hold">
+                                          <p:stCondLst>
+                                            <p:cond delay="0"/>
+                                          </p:stCondLst>
+                                        </p:cTn>
+                                        <p:tgtEl>
+                                          <p:spTgt spid="8"/>
+                                        </p:tgtEl>
+                                        <p:attrNameLst>
+                                          <p:attrName>style.visibility</p:attrName>
+                                        </p:attrNameLst>
+                                      </p:cBhvr>
+                                      <p:to>
+                                        <p:strVal val="visible"/>
+                                      </p:to>
+                                    </p:set>
+                                    <p:animEffect transition="in" filter="fade">
+                                      <p:cBhvr>
+                                        <p:cTn id="11" dur="500"/>
+                                        <p:tgtEl>
+                                          <p:spTgt spid="8"/>
+                                        </p:tgtEl>
+                                      </p:cBhvr>
+                                    </p:animEffect>
+                                  </p:childTnLst>
+                                </p:cTn>
+                              </p:par>
+                            </p:childTnLst>
+                          </p:cTn>
+                        </p:par>
+                      </p:childTnLst>
+                    </p:cTn>
+                  </p:par>
+                </p:childTnLst>
+              </p:cTn>
+              <p:prevCondLst>
+                <p:cond evt="onPrev" delay="0">
+                  <p:tgtEl>
+                    <p:sldTgt/>
+                  </p:tgtEl>
+                </p:cond>
+              </p:prevCondLst>
+              <p:nextCondLst>
+                <p:cond evt="onNext" delay="0">
+                  <p:tgtEl>
+                    <p:sldTgt/>
+                  </p:tgtEl>
+                </p:cond>
+              </p:nextCondLst>
+            </p:seq>
+          </p:childTnLst>
+        </p:cTn>
+      </p:par>
+    </p:tnLst>
+    <p:bldLst>
+      <p:bldP spid="7" grpId="0"/>
+      <p:bldP spid="8" grpId="0"/>
+    </p:bldLst>
+  </p:timing>
+</p:sld>
+</file>
+
+<file path=ppt/slides/slide20.xml><?xml version="1.0" encoding="utf-8"?>
 <p:sld xmlns:a="http://schemas.openxmlformats.org/drawingml/2006/main" xmlns:r="http://schemas.openxmlformats.org/officeDocument/2006/relationships" xmlns:p="http://schemas.openxmlformats.org/presentationml/2006/main">
   <p:cSld>
     <p:spTree>
@@ -12592,7 +13542,7 @@
             <a:fld id="{D6477167-E697-4EBC-B8EC-2672F922F3D4}" type="slidenum">
               <a:rPr lang="en-US" smtClean="0"/>
               <a:pPr/>
-              <a:t>19</a:t>
+              <a:t>20</a:t>
             </a:fld>
             <a:endParaRPr lang="en-US" dirty="0"/>
           </a:p>
@@ -12608,13 +13558,13 @@
   <p:clrMapOvr>
     <a:masterClrMapping/>
   </p:clrMapOvr>
-  <mc:AlternateContent xmlns:mc="http://schemas.openxmlformats.org/markup-compatibility/2006">
-    <mc:Choice xmlns:p14="http://schemas.microsoft.com/office/powerpoint/2010/main" Requires="p14">
+  <mc:AlternateContent xmlns:mc="http://schemas.openxmlformats.org/markup-compatibility/2006" xmlns:p14="http://schemas.microsoft.com/office/powerpoint/2010/main">
+    <mc:Choice Requires="p14">
       <p:transition spd="med" p14:dur="700">
         <p:fade/>
       </p:transition>
     </mc:Choice>
-    <mc:Fallback>
+    <mc:Fallback xmlns="">
       <p:transition spd="med">
         <p:fade/>
       </p:transition>
@@ -12901,421 +13851,7 @@
 </p:sld>
 </file>
 
-<file path=ppt/slides/slide2.xml><?xml version="1.0" encoding="utf-8"?>
-<p:sld xmlns:a="http://schemas.openxmlformats.org/drawingml/2006/main" xmlns:r="http://schemas.openxmlformats.org/officeDocument/2006/relationships" xmlns:p="http://schemas.openxmlformats.org/presentationml/2006/main">
-  <p:cSld>
-    <p:spTree>
-      <p:nvGrpSpPr>
-        <p:cNvPr id="1" name="">
-          <a:extLst>
-            <a:ext uri="{FF2B5EF4-FFF2-40B4-BE49-F238E27FC236}">
-              <a16:creationId xmlns:a16="http://schemas.microsoft.com/office/drawing/2014/main" id="{9242C76D-3A47-444C-8B28-2485B50539CB}"/>
-            </a:ext>
-          </a:extLst>
-        </p:cNvPr>
-        <p:cNvGrpSpPr/>
-        <p:nvPr/>
-      </p:nvGrpSpPr>
-      <p:grpSpPr>
-        <a:xfrm>
-          <a:off x="0" y="0"/>
-          <a:ext cx="0" cy="0"/>
-          <a:chOff x="0" y="0"/>
-          <a:chExt cx="0" cy="0"/>
-        </a:xfrm>
-      </p:grpSpPr>
-      <p:sp>
-        <p:nvSpPr>
-          <p:cNvPr id="7" name="Rectangle 6">
-            <a:extLst>
-              <a:ext uri="{FF2B5EF4-FFF2-40B4-BE49-F238E27FC236}">
-                <a16:creationId xmlns:a16="http://schemas.microsoft.com/office/drawing/2014/main" id="{EBBC7743-7A38-0C99-86CD-EC89D8C83736}"/>
-              </a:ext>
-            </a:extLst>
-          </p:cNvPr>
-          <p:cNvSpPr/>
-          <p:nvPr/>
-        </p:nvSpPr>
-        <p:spPr>
-          <a:xfrm>
-            <a:off x="773829" y="328120"/>
-            <a:ext cx="9078447" cy="848950"/>
-          </a:xfrm>
-          <a:prstGeom prst="rect">
-            <a:avLst/>
-          </a:prstGeom>
-          <a:noFill/>
-        </p:spPr>
-        <p:txBody>
-          <a:bodyPr wrap="none" lIns="91440" tIns="45720" rIns="91440" bIns="45720">
-            <a:spAutoFit/>
-          </a:bodyPr>
-          <a:lstStyle/>
-          <a:p>
-            <a:pPr algn="ctr">
-              <a:lnSpc>
-                <a:spcPts val="5850"/>
-              </a:lnSpc>
-            </a:pPr>
-            <a:r>
-              <a:rPr lang="en-US" sz="5400" b="1" dirty="0">
-                <a:solidFill>
-                  <a:srgbClr val="0359A6"/>
-                </a:solidFill>
-                <a:latin typeface="Times New Roman" panose="02020603050405020304" pitchFamily="18" charset="0"/>
-                <a:ea typeface="Petrona Bold" pitchFamily="34" charset="-122"/>
-                <a:cs typeface="Times New Roman" panose="02020603050405020304" pitchFamily="18" charset="0"/>
-              </a:rPr>
-              <a:t>Project Description – “Why?”</a:t>
-            </a:r>
-            <a:endParaRPr lang="en-US" sz="5400" dirty="0">
-              <a:solidFill>
-                <a:srgbClr val="0359A6"/>
-              </a:solidFill>
-              <a:latin typeface="Times New Roman" panose="02020603050405020304" pitchFamily="18" charset="0"/>
-              <a:cs typeface="Times New Roman" panose="02020603050405020304" pitchFamily="18" charset="0"/>
-            </a:endParaRPr>
-          </a:p>
-        </p:txBody>
-      </p:sp>
-      <p:sp>
-        <p:nvSpPr>
-          <p:cNvPr id="2" name="Date Placeholder 1">
-            <a:extLst>
-              <a:ext uri="{FF2B5EF4-FFF2-40B4-BE49-F238E27FC236}">
-                <a16:creationId xmlns:a16="http://schemas.microsoft.com/office/drawing/2014/main" id="{28332DD2-54CB-46E7-9080-47B2B0A4B22A}"/>
-              </a:ext>
-            </a:extLst>
-          </p:cNvPr>
-          <p:cNvSpPr>
-            <a:spLocks noGrp="1"/>
-          </p:cNvSpPr>
-          <p:nvPr>
-            <p:ph type="dt" sz="half" idx="10"/>
-          </p:nvPr>
-        </p:nvSpPr>
-        <p:spPr/>
-        <p:txBody>
-          <a:bodyPr/>
-          <a:lstStyle/>
-          <a:p>
-            <a:fld id="{66177986-49C3-4761-8392-D13F3E990A0C}" type="datetime1">
-              <a:rPr lang="en-US" smtClean="0"/>
-              <a:t>4/23/2026</a:t>
-            </a:fld>
-            <a:endParaRPr lang="en-US"/>
-          </a:p>
-        </p:txBody>
-      </p:sp>
-      <p:sp>
-        <p:nvSpPr>
-          <p:cNvPr id="3" name="Slide Number Placeholder 2">
-            <a:extLst>
-              <a:ext uri="{FF2B5EF4-FFF2-40B4-BE49-F238E27FC236}">
-                <a16:creationId xmlns:a16="http://schemas.microsoft.com/office/drawing/2014/main" id="{3EE9D753-7AE1-DA76-6663-11DAE7BC6722}"/>
-              </a:ext>
-            </a:extLst>
-          </p:cNvPr>
-          <p:cNvSpPr>
-            <a:spLocks noGrp="1"/>
-          </p:cNvSpPr>
-          <p:nvPr>
-            <p:ph type="sldNum" sz="quarter" idx="12"/>
-          </p:nvPr>
-        </p:nvSpPr>
-        <p:spPr/>
-        <p:txBody>
-          <a:bodyPr/>
-          <a:lstStyle/>
-          <a:p>
-            <a:fld id="{D6477167-E697-4EBC-B8EC-2672F922F3D4}" type="slidenum">
-              <a:rPr lang="en-US" smtClean="0"/>
-              <a:pPr/>
-              <a:t>2</a:t>
-            </a:fld>
-            <a:endParaRPr lang="en-US" dirty="0"/>
-          </a:p>
-        </p:txBody>
-      </p:sp>
-      <p:sp>
-        <p:nvSpPr>
-          <p:cNvPr id="8" name="TextBox 7">
-            <a:extLst>
-              <a:ext uri="{FF2B5EF4-FFF2-40B4-BE49-F238E27FC236}">
-                <a16:creationId xmlns:a16="http://schemas.microsoft.com/office/drawing/2014/main" id="{4CDCA282-1FCA-9E2E-47C0-5548540E854E}"/>
-              </a:ext>
-            </a:extLst>
-          </p:cNvPr>
-          <p:cNvSpPr txBox="1"/>
-          <p:nvPr/>
-        </p:nvSpPr>
-        <p:spPr>
-          <a:xfrm>
-            <a:off x="793790" y="1762564"/>
-            <a:ext cx="8525308" cy="3939540"/>
-          </a:xfrm>
-          <a:prstGeom prst="rect">
-            <a:avLst/>
-          </a:prstGeom>
-          <a:noFill/>
-        </p:spPr>
-        <p:txBody>
-          <a:bodyPr wrap="square" rtlCol="0">
-            <a:spAutoFit/>
-          </a:bodyPr>
-          <a:lstStyle/>
-          <a:p>
-            <a:r>
-              <a:rPr lang="en-US" sz="3600" b="1" dirty="0">
-                <a:solidFill>
-                  <a:srgbClr val="0359A6"/>
-                </a:solidFill>
-                <a:latin typeface="Times New Roman" panose="02020603050405020304" pitchFamily="18" charset="0"/>
-                <a:ea typeface="Petrona Bold" pitchFamily="34" charset="-122"/>
-                <a:cs typeface="Times New Roman" panose="02020603050405020304" pitchFamily="18" charset="0"/>
-              </a:rPr>
-              <a:t>Why Image-Based Clone Detection?</a:t>
-            </a:r>
-            <a:endParaRPr lang="en-US" dirty="0">
-              <a:solidFill>
-                <a:srgbClr val="0359A6"/>
-              </a:solidFill>
-              <a:latin typeface="Times New Roman" panose="02020603050405020304" pitchFamily="18" charset="0"/>
-              <a:cs typeface="Times New Roman" panose="02020603050405020304" pitchFamily="18" charset="0"/>
-            </a:endParaRPr>
-          </a:p>
-          <a:p>
-            <a:endParaRPr lang="en-US" dirty="0"/>
-          </a:p>
-          <a:p>
-            <a:pPr marL="342900" indent="-342900">
-              <a:buFont typeface="Arial" panose="020B0604020202020204" pitchFamily="34" charset="0"/>
-              <a:buChar char="•"/>
-            </a:pPr>
-            <a:r>
-              <a:rPr lang="en-US" sz="2800" dirty="0"/>
-              <a:t>Language-independent approach</a:t>
-            </a:r>
-          </a:p>
-          <a:p>
-            <a:pPr marL="342900" indent="-342900">
-              <a:buFont typeface="Arial" panose="020B0604020202020204" pitchFamily="34" charset="0"/>
-              <a:buChar char="•"/>
-            </a:pPr>
-            <a:r>
-              <a:rPr lang="en-US" sz="2800" dirty="0"/>
-              <a:t>Captures structural similarity visually</a:t>
-            </a:r>
-          </a:p>
-          <a:p>
-            <a:pPr marL="342900" indent="-342900">
-              <a:buFont typeface="Arial" panose="020B0604020202020204" pitchFamily="34" charset="0"/>
-              <a:buChar char="•"/>
-            </a:pPr>
-            <a:r>
-              <a:rPr lang="en-US" sz="2800" dirty="0"/>
-              <a:t>Robust to:</a:t>
-            </a:r>
-          </a:p>
-          <a:p>
-            <a:pPr marL="800100" lvl="1" indent="-342900">
-              <a:buFont typeface="Arial" panose="020B0604020202020204" pitchFamily="34" charset="0"/>
-              <a:buChar char="•"/>
-            </a:pPr>
-            <a:r>
-              <a:rPr lang="en-US" sz="2800" dirty="0"/>
-              <a:t>Variable renaming</a:t>
-            </a:r>
-          </a:p>
-          <a:p>
-            <a:pPr marL="800100" lvl="1" indent="-342900">
-              <a:buFont typeface="Arial" panose="020B0604020202020204" pitchFamily="34" charset="0"/>
-              <a:buChar char="•"/>
-            </a:pPr>
-            <a:r>
-              <a:rPr lang="en-US" sz="2800" dirty="0"/>
-              <a:t>Formatting changes</a:t>
-            </a:r>
-          </a:p>
-          <a:p>
-            <a:pPr marL="800100" lvl="1" indent="-342900">
-              <a:buFont typeface="Arial" panose="020B0604020202020204" pitchFamily="34" charset="0"/>
-              <a:buChar char="•"/>
-            </a:pPr>
-            <a:endParaRPr lang="en-US" sz="2800" dirty="0"/>
-          </a:p>
-          <a:p>
-            <a:pPr marL="342900" indent="-342900">
-              <a:buFont typeface="Arial" panose="020B0604020202020204" pitchFamily="34" charset="0"/>
-              <a:buChar char="•"/>
-            </a:pPr>
-            <a:r>
-              <a:rPr lang="en-US" sz="2800" dirty="0"/>
-              <a:t>Goes beyond traditional text-based detection</a:t>
-            </a:r>
-          </a:p>
-        </p:txBody>
-      </p:sp>
-    </p:spTree>
-    <p:extLst>
-      <p:ext uri="{BB962C8B-B14F-4D97-AF65-F5344CB8AC3E}">
-        <p14:creationId xmlns:p14="http://schemas.microsoft.com/office/powerpoint/2010/main" val="1502835694"/>
-      </p:ext>
-    </p:extLst>
-  </p:cSld>
-  <p:clrMapOvr>
-    <a:masterClrMapping/>
-  </p:clrMapOvr>
-  <mc:AlternateContent xmlns:mc="http://schemas.openxmlformats.org/markup-compatibility/2006">
-    <mc:Choice xmlns:p14="http://schemas.microsoft.com/office/powerpoint/2010/main" Requires="p14">
-      <p:transition spd="med" p14:dur="700">
-        <p:fade/>
-      </p:transition>
-    </mc:Choice>
-    <mc:Fallback>
-      <p:transition spd="med">
-        <p:fade/>
-      </p:transition>
-    </mc:Fallback>
-  </mc:AlternateContent>
-  <p:timing>
-    <p:tnLst>
-      <p:par>
-        <p:cTn id="1" dur="indefinite" restart="never" nodeType="tmRoot">
-          <p:childTnLst>
-            <p:seq concurrent="1" nextAc="seek">
-              <p:cTn id="2" dur="indefinite" nodeType="mainSeq">
-                <p:childTnLst>
-                  <p:par>
-                    <p:cTn id="3" fill="hold">
-                      <p:stCondLst>
-                        <p:cond delay="indefinite"/>
-                        <p:cond evt="onBegin" delay="0">
-                          <p:tn val="2"/>
-                        </p:cond>
-                      </p:stCondLst>
-                      <p:childTnLst>
-                        <p:par>
-                          <p:cTn id="4" fill="hold">
-                            <p:stCondLst>
-                              <p:cond delay="0"/>
-                            </p:stCondLst>
-                            <p:childTnLst>
-                              <p:par>
-                                <p:cTn id="5" presetID="10" presetClass="entr" presetSubtype="0" fill="hold" grpId="0" nodeType="withEffect">
-                                  <p:stCondLst>
-                                    <p:cond delay="0"/>
-                                  </p:stCondLst>
-                                  <p:childTnLst>
-                                    <p:set>
-                                      <p:cBhvr>
-                                        <p:cTn id="6" dur="1" fill="hold">
-                                          <p:stCondLst>
-                                            <p:cond delay="0"/>
-                                          </p:stCondLst>
-                                        </p:cTn>
-                                        <p:tgtEl>
-                                          <p:spTgt spid="7"/>
-                                        </p:tgtEl>
-                                        <p:attrNameLst>
-                                          <p:attrName>style.visibility</p:attrName>
-                                        </p:attrNameLst>
-                                      </p:cBhvr>
-                                      <p:to>
-                                        <p:strVal val="visible"/>
-                                      </p:to>
-                                    </p:set>
-                                    <p:animEffect transition="in" filter="fade">
-                                      <p:cBhvr>
-                                        <p:cTn id="7" dur="500"/>
-                                        <p:tgtEl>
-                                          <p:spTgt spid="7"/>
-                                        </p:tgtEl>
-                                      </p:cBhvr>
-                                    </p:animEffect>
-                                  </p:childTnLst>
-                                </p:cTn>
-                              </p:par>
-                            </p:childTnLst>
-                          </p:cTn>
-                        </p:par>
-                        <p:par>
-                          <p:cTn id="8" fill="hold">
-                            <p:stCondLst>
-                              <p:cond delay="500"/>
-                            </p:stCondLst>
-                            <p:childTnLst>
-                              <p:par>
-                                <p:cTn id="9" presetID="10" presetClass="entr" presetSubtype="0" fill="hold" grpId="0" nodeType="afterEffect">
-                                  <p:stCondLst>
-                                    <p:cond delay="0"/>
-                                  </p:stCondLst>
-                                  <p:childTnLst>
-                                    <p:set>
-                                      <p:cBhvr>
-                                        <p:cTn id="10" dur="1" fill="hold">
-                                          <p:stCondLst>
-                                            <p:cond delay="0"/>
-                                          </p:stCondLst>
-                                        </p:cTn>
-                                        <p:tgtEl>
-                                          <p:spTgt spid="8"/>
-                                        </p:tgtEl>
-                                        <p:attrNameLst>
-                                          <p:attrName>style.visibility</p:attrName>
-                                        </p:attrNameLst>
-                                      </p:cBhvr>
-                                      <p:to>
-                                        <p:strVal val="visible"/>
-                                      </p:to>
-                                    </p:set>
-                                    <p:animEffect transition="in" filter="fade">
-                                      <p:cBhvr>
-                                        <p:cTn id="11" dur="500"/>
-                                        <p:tgtEl>
-                                          <p:spTgt spid="8"/>
-                                        </p:tgtEl>
-                                      </p:cBhvr>
-                                    </p:animEffect>
-                                  </p:childTnLst>
-                                </p:cTn>
-                              </p:par>
-                            </p:childTnLst>
-                          </p:cTn>
-                        </p:par>
-                      </p:childTnLst>
-                    </p:cTn>
-                  </p:par>
-                </p:childTnLst>
-              </p:cTn>
-              <p:prevCondLst>
-                <p:cond evt="onPrev" delay="0">
-                  <p:tgtEl>
-                    <p:sldTgt/>
-                  </p:tgtEl>
-                </p:cond>
-              </p:prevCondLst>
-              <p:nextCondLst>
-                <p:cond evt="onNext" delay="0">
-                  <p:tgtEl>
-                    <p:sldTgt/>
-                  </p:tgtEl>
-                </p:cond>
-              </p:nextCondLst>
-            </p:seq>
-          </p:childTnLst>
-        </p:cTn>
-      </p:par>
-    </p:tnLst>
-    <p:bldLst>
-      <p:bldP spid="7" grpId="0"/>
-      <p:bldP spid="8" grpId="0"/>
-    </p:bldLst>
-  </p:timing>
-</p:sld>
-</file>
-
-<file path=ppt/slides/slide20.xml><?xml version="1.0" encoding="utf-8"?>
+<file path=ppt/slides/slide21.xml><?xml version="1.0" encoding="utf-8"?>
 <p:sld xmlns:a="http://schemas.openxmlformats.org/drawingml/2006/main" xmlns:r="http://schemas.openxmlformats.org/officeDocument/2006/relationships" xmlns:p="http://schemas.openxmlformats.org/presentationml/2006/main">
   <p:cSld>
     <p:spTree>
@@ -13565,7 +14101,7 @@
             <a:fld id="{D6477167-E697-4EBC-B8EC-2672F922F3D4}" type="slidenum">
               <a:rPr lang="en-US" smtClean="0"/>
               <a:pPr/>
-              <a:t>20</a:t>
+              <a:t>21</a:t>
             </a:fld>
             <a:endParaRPr lang="en-US" dirty="0"/>
           </a:p>
@@ -13721,7 +14257,7 @@
 </p:sld>
 </file>
 
-<file path=ppt/slides/slide21.xml><?xml version="1.0" encoding="utf-8"?>
+<file path=ppt/slides/slide22.xml><?xml version="1.0" encoding="utf-8"?>
 <p:sld xmlns:a="http://schemas.openxmlformats.org/drawingml/2006/main" xmlns:r="http://schemas.openxmlformats.org/officeDocument/2006/relationships" xmlns:p="http://schemas.openxmlformats.org/presentationml/2006/main">
   <p:cSld>
     <p:spTree>
@@ -13928,7 +14464,7 @@
             <a:fld id="{D6477167-E697-4EBC-B8EC-2672F922F3D4}" type="slidenum">
               <a:rPr lang="en-US" smtClean="0"/>
               <a:pPr/>
-              <a:t>21</a:t>
+              <a:t>22</a:t>
             </a:fld>
             <a:endParaRPr lang="en-US" dirty="0"/>
           </a:p>
@@ -16606,8 +17142,8 @@
           <a:chExt cx="0" cy="0"/>
         </a:xfrm>
       </p:grpSpPr>
-      <mc:AlternateContent xmlns:mc="http://schemas.openxmlformats.org/markup-compatibility/2006">
-        <mc:Choice xmlns:a14="http://schemas.microsoft.com/office/drawing/2010/main" Requires="a14">
+      <mc:AlternateContent xmlns:mc="http://schemas.openxmlformats.org/markup-compatibility/2006" xmlns:a14="http://schemas.microsoft.com/office/drawing/2010/main">
+        <mc:Choice Requires="a14">
           <p:sp>
             <p:nvSpPr>
               <p:cNvPr id="4" name="TextBox 3">
@@ -16878,7 +17414,7 @@
             </p:txBody>
           </p:sp>
         </mc:Choice>
-        <mc:Fallback>
+        <mc:Fallback xmlns="">
           <p:sp>
             <p:nvSpPr>
               <p:cNvPr id="4" name="TextBox 3">
@@ -18921,8 +19457,8 @@
           <a:chExt cx="0" cy="0"/>
         </a:xfrm>
       </p:grpSpPr>
-      <mc:AlternateContent xmlns:mc="http://schemas.openxmlformats.org/markup-compatibility/2006">
-        <mc:Choice xmlns:a14="http://schemas.microsoft.com/office/drawing/2010/main" Requires="a14">
+      <mc:AlternateContent xmlns:mc="http://schemas.openxmlformats.org/markup-compatibility/2006" xmlns:a14="http://schemas.microsoft.com/office/drawing/2010/main">
+        <mc:Choice Requires="a14">
           <p:sp>
             <p:nvSpPr>
               <p:cNvPr id="4" name="TextBox 3">
@@ -19190,7 +19726,7 @@
             </p:txBody>
           </p:sp>
         </mc:Choice>
-        <mc:Fallback>
+        <mc:Fallback xmlns="">
           <p:sp>
             <p:nvSpPr>
               <p:cNvPr id="4" name="TextBox 3">
